--- a/Module 2/module-02-day-2-data-validation-quality-testing.pptx
+++ b/Module 2/module-02-day-2-data-validation-quality-testing.pptx
@@ -134,6 +134,80 @@
 </p:presentation>
 </file>
 
+<file path=ppt/changesInfos/changesInfo1.xml><?xml version="1.0" encoding="utf-8"?>
+<pc:chgInfo xmlns:a="http://schemas.openxmlformats.org/drawingml/2006/main" xmlns:r="http://schemas.openxmlformats.org/officeDocument/2006/relationships" xmlns:ac="http://schemas.microsoft.com/office/drawing/2013/main/command" xmlns:pc="http://schemas.microsoft.com/office/powerpoint/2013/main/command">
+  <pc:docChgLst>
+    <pc:chgData name="Kishore" userId="d5d7dcb1-c230-4dcd-8c6f-b1fcba07fb95" providerId="ADAL" clId="{1AA63CBA-B78F-5B68-980E-9084EFF8E084}"/>
+    <pc:docChg chg="modSld">
+      <pc:chgData name="Kishore" userId="d5d7dcb1-c230-4dcd-8c6f-b1fcba07fb95" providerId="ADAL" clId="{1AA63CBA-B78F-5B68-980E-9084EFF8E084}" dt="2026-05-18T02:44:33.150" v="28" actId="20577"/>
+      <pc:docMkLst>
+        <pc:docMk/>
+      </pc:docMkLst>
+      <pc:sldChg chg="modSp mod">
+        <pc:chgData name="Kishore" userId="d5d7dcb1-c230-4dcd-8c6f-b1fcba07fb95" providerId="ADAL" clId="{1AA63CBA-B78F-5B68-980E-9084EFF8E084}" dt="2026-05-18T02:43:06.034" v="9" actId="14100"/>
+        <pc:sldMkLst>
+          <pc:docMk/>
+          <pc:sldMk cId="1284672907" sldId="256"/>
+        </pc:sldMkLst>
+        <pc:spChg chg="mod">
+          <ac:chgData name="Kishore" userId="d5d7dcb1-c230-4dcd-8c6f-b1fcba07fb95" providerId="ADAL" clId="{1AA63CBA-B78F-5B68-980E-9084EFF8E084}" dt="2026-05-18T02:43:06.034" v="9" actId="14100"/>
+          <ac:spMkLst>
+            <pc:docMk/>
+            <pc:sldMk cId="1284672907" sldId="256"/>
+            <ac:spMk id="9" creationId="{77E01834-13F3-4294-A8D5-7E4218DC452E}"/>
+          </ac:spMkLst>
+        </pc:spChg>
+      </pc:sldChg>
+      <pc:sldChg chg="modSp mod">
+        <pc:chgData name="Kishore" userId="d5d7dcb1-c230-4dcd-8c6f-b1fcba07fb95" providerId="ADAL" clId="{1AA63CBA-B78F-5B68-980E-9084EFF8E084}" dt="2026-05-18T02:43:27.230" v="18" actId="20577"/>
+        <pc:sldMkLst>
+          <pc:docMk/>
+          <pc:sldMk cId="1073620851" sldId="259"/>
+        </pc:sldMkLst>
+        <pc:spChg chg="mod">
+          <ac:chgData name="Kishore" userId="d5d7dcb1-c230-4dcd-8c6f-b1fcba07fb95" providerId="ADAL" clId="{1AA63CBA-B78F-5B68-980E-9084EFF8E084}" dt="2026-05-18T02:43:27.230" v="18" actId="20577"/>
+          <ac:spMkLst>
+            <pc:docMk/>
+            <pc:sldMk cId="1073620851" sldId="259"/>
+            <ac:spMk id="8" creationId="{598EA6C4-3A65-4918-BC09-10238179AAB9}"/>
+          </ac:spMkLst>
+        </pc:spChg>
+      </pc:sldChg>
+      <pc:sldChg chg="modSp mod">
+        <pc:chgData name="Kishore" userId="d5d7dcb1-c230-4dcd-8c6f-b1fcba07fb95" providerId="ADAL" clId="{1AA63CBA-B78F-5B68-980E-9084EFF8E084}" dt="2026-05-18T02:43:57.349" v="19" actId="14100"/>
+        <pc:sldMkLst>
+          <pc:docMk/>
+          <pc:sldMk cId="1567982894" sldId="263"/>
+        </pc:sldMkLst>
+        <pc:spChg chg="mod">
+          <ac:chgData name="Kishore" userId="d5d7dcb1-c230-4dcd-8c6f-b1fcba07fb95" providerId="ADAL" clId="{1AA63CBA-B78F-5B68-980E-9084EFF8E084}" dt="2026-05-18T02:43:57.349" v="19" actId="14100"/>
+          <ac:spMkLst>
+            <pc:docMk/>
+            <pc:sldMk cId="1567982894" sldId="263"/>
+            <ac:spMk id="13" creationId="{81AEA8B7-EAD1-4F89-9BB3-7213517D14B3}"/>
+          </ac:spMkLst>
+        </pc:spChg>
+      </pc:sldChg>
+      <pc:sldChg chg="modSp mod">
+        <pc:chgData name="Kishore" userId="d5d7dcb1-c230-4dcd-8c6f-b1fcba07fb95" providerId="ADAL" clId="{1AA63CBA-B78F-5B68-980E-9084EFF8E084}" dt="2026-05-18T02:44:33.150" v="28" actId="20577"/>
+        <pc:sldMkLst>
+          <pc:docMk/>
+          <pc:sldMk cId="505597545" sldId="271"/>
+        </pc:sldMkLst>
+        <pc:spChg chg="mod">
+          <ac:chgData name="Kishore" userId="d5d7dcb1-c230-4dcd-8c6f-b1fcba07fb95" providerId="ADAL" clId="{1AA63CBA-B78F-5B68-980E-9084EFF8E084}" dt="2026-05-18T02:44:33.150" v="28" actId="20577"/>
+          <ac:spMkLst>
+            <pc:docMk/>
+            <pc:sldMk cId="505597545" sldId="271"/>
+            <ac:spMk id="8" creationId="{C4245FC7-B306-498E-91BD-0A48AFF4B289}"/>
+          </ac:spMkLst>
+        </pc:spChg>
+      </pc:sldChg>
+    </pc:docChg>
+  </pc:docChgLst>
+</pc:chgInfo>
+</file>
+
 <file path=ppt/notesMasters/notesMaster1.xml><?xml version="1.0" encoding="utf-8"?>
 <p:notesMaster xmlns:a="http://schemas.openxmlformats.org/drawingml/2006/main" xmlns:r="http://schemas.openxmlformats.org/officeDocument/2006/relationships" xmlns:p="http://schemas.openxmlformats.org/presentationml/2006/main">
   <p:cSld>
@@ -7082,8 +7156,8 @@
         </p:nvSpPr>
         <p:spPr>
           <a:xfrm>
-            <a:off x="723900" y="1219200"/>
-            <a:ext cx="6477000" cy="1009650"/>
+            <a:off x="723899" y="1219200"/>
+            <a:ext cx="7747747" cy="1009650"/>
           </a:xfrm>
           <a:prstGeom prst="rect">
             <a:avLst/>
@@ -7117,7 +7191,7 @@
               </a:defRPr>
             </a:pPr>
             <a:r>
-              <a:rPr sz="3000" b="1">
+              <a:rPr lang="en-US" sz="3000" b="1" dirty="0">
                 <a:solidFill>
                   <a:srgbClr val="FFFFFF"/>
                 </a:solidFill>
@@ -7125,7 +7199,18 @@
                 <a:ea typeface="Caladea"/>
                 <a:cs typeface="Caladea"/>
               </a:rPr>
-              <a:t>Day 2: Data Validation &amp; Quality Testing</a:t>
+              <a:t>Module</a:t>
+            </a:r>
+            <a:r>
+              <a:rPr sz="3000" b="1" dirty="0">
+                <a:solidFill>
+                  <a:srgbClr val="FFFFFF"/>
+                </a:solidFill>
+                <a:latin typeface="Caladea"/>
+                <a:ea typeface="Caladea"/>
+                <a:cs typeface="Caladea"/>
+              </a:rPr>
+              <a:t> 2: Data Validation &amp; Quality Testing</a:t>
             </a:r>
           </a:p>
         </p:txBody>
@@ -15566,7 +15651,7 @@
               </a:defRPr>
             </a:pPr>
             <a:r>
-              <a:rPr sz="2400" b="1">
+              <a:rPr lang="en-US" sz="2400" b="1" dirty="0">
                 <a:solidFill>
                   <a:srgbClr val="122033"/>
                 </a:solidFill>
@@ -15574,7 +15659,18 @@
                 <a:ea typeface="Caladea"/>
                 <a:cs typeface="Caladea"/>
               </a:rPr>
-              <a:t>Day 2 scenario</a:t>
+              <a:t>Module</a:t>
+            </a:r>
+            <a:r>
+              <a:rPr sz="2400" b="1" dirty="0">
+                <a:solidFill>
+                  <a:srgbClr val="122033"/>
+                </a:solidFill>
+                <a:latin typeface="Caladea"/>
+                <a:ea typeface="Caladea"/>
+                <a:cs typeface="Caladea"/>
+              </a:rPr>
+              <a:t> 2 scenario</a:t>
             </a:r>
           </a:p>
         </p:txBody>
@@ -24502,7 +24598,7 @@
               </a:defRPr>
             </a:pPr>
             <a:r>
-              <a:rPr sz="2400" b="1">
+              <a:rPr lang="en-US" sz="2400" b="1" dirty="0">
                 <a:solidFill>
                   <a:srgbClr val="122033"/>
                 </a:solidFill>
@@ -24510,7 +24606,18 @@
                 <a:ea typeface="Caladea"/>
                 <a:cs typeface="Caladea"/>
               </a:rPr>
-              <a:t>Day 2 learning objectives</a:t>
+              <a:t>Module</a:t>
+            </a:r>
+            <a:r>
+              <a:rPr sz="2400" b="1" dirty="0">
+                <a:solidFill>
+                  <a:srgbClr val="122033"/>
+                </a:solidFill>
+                <a:latin typeface="Caladea"/>
+                <a:ea typeface="Caladea"/>
+                <a:cs typeface="Caladea"/>
+              </a:rPr>
+              <a:t> 2 learning objectives</a:t>
             </a:r>
           </a:p>
         </p:txBody>
@@ -30403,7 +30510,7 @@
         <p:spPr>
           <a:xfrm>
             <a:off x="1047750" y="3638550"/>
-            <a:ext cx="2705100" cy="1714500"/>
+            <a:ext cx="3143250" cy="1714500"/>
           </a:xfrm>
           <a:prstGeom prst="rect">
             <a:avLst/>
